--- a/classes/parte-4-seguridad-de-aplicaciones-web/086-arquitectura-web-moderna-y-superficie-de-ataque/clase-086-presentacion.pptx
+++ b/classes/parte-4-seguridad-de-aplicaciones-web/086-arquitectura-web-moderna-y-superficie-de-ataque/clase-086-presentacion.pptx
@@ -17,6 +17,9 @@
     <p:sldId id="265" r:id="rId16"/>
     <p:sldId id="266" r:id="rId17"/>
     <p:sldId id="267" r:id="rId18"/>
+    <p:sldId id="268" r:id="rId19"/>
+    <p:sldId id="269" r:id="rId20"/>
+    <p:sldId id="270" r:id="rId21"/>
   </p:sldIdLst>
   <p:sldSz cx="9144000" cy="6858000" type="screen4x3"/>
   <p:notesSz cx="6858000" cy="9144000"/>
@@ -3198,7 +3201,7 @@
                   <a:srgbClr val="0B3D2E"/>
                 </a:solidFill>
               </a:rPr>
-              <a:t>⚠️ Errores comunes</a:t>
+              <a:t>✍️ Ejercicios</a:t>
             </a:r>
           </a:p>
         </p:txBody>
@@ -3236,67 +3239,82 @@
                   <a:srgbClr val="22282E"/>
                 </a:solidFill>
               </a:rPr>
-              <a:t>•  Burp no ve tráfico HTTPS — Falta instalar el CA de Burp en el navegador</a:t>
-            </a:r>
-          </a:p>
-          <a:p>
-            <a:pPr>
-              <a:spcAft>
-                <a:spcPts val="600"/>
-              </a:spcAft>
-            </a:pPr>
-            <a:r>
-              <a:rPr sz="1500">
-                <a:solidFill>
-                  <a:srgbClr val="22282E"/>
-                </a:solidFill>
-              </a:rPr>
-              <a:t>•  "Confiar solo en la UI" — Endpoints ocultos en el JS; revisa Sources y sitemap</a:t>
-            </a:r>
-          </a:p>
-          <a:p>
-            <a:pPr>
-              <a:spcAft>
-                <a:spcPts val="600"/>
-              </a:spcAft>
-            </a:pPr>
-            <a:r>
-              <a:rPr sz="1500">
-                <a:solidFill>
-                  <a:srgbClr val="22282E"/>
-                </a:solidFill>
-              </a:rPr>
-              <a:t>•  Se ignoran cabeceras y cookies — Son inputs válidos; inclúyelos en el mapa</a:t>
-            </a:r>
-          </a:p>
-          <a:p>
-            <a:pPr>
-              <a:spcAft>
-                <a:spcPts val="600"/>
-              </a:spcAft>
-            </a:pPr>
-            <a:r>
-              <a:rPr sz="1500">
-                <a:solidFill>
-                  <a:srgbClr val="22282E"/>
-                </a:solidFill>
-              </a:rPr>
-              <a:t>•  Escanear fuera del laboratorio — Ilegal sin permiso; limita el scope en Burp</a:t>
-            </a:r>
-          </a:p>
-          <a:p>
-            <a:pPr>
-              <a:spcAft>
-                <a:spcPts val="600"/>
-              </a:spcAft>
-            </a:pPr>
-            <a:r>
-              <a:rPr sz="1500">
-                <a:solidFill>
-                  <a:srgbClr val="22282E"/>
-                </a:solidFill>
-              </a:rPr>
-              <a:t>•  Confundir HTTP/2 con HTTP/1 — Afecta a ataques de smuggling; identifica el protocolo</a:t>
+              <a:t>•  Lista 10 puntos de entrada distintos en Juice Shop (incluye cabeceras y cookies).</a:t>
+            </a:r>
+          </a:p>
+          <a:p>
+            <a:pPr>
+              <a:spcAft>
+                <a:spcPts val="600"/>
+              </a:spcAft>
+            </a:pPr>
+            <a:r>
+              <a:rPr sz="1500">
+                <a:solidFill>
+                  <a:srgbClr val="22282E"/>
+                </a:solidFill>
+              </a:rPr>
+              <a:t>•  Identifica qué controles de seguridad son de cliente (validación JS) y cuáles de servidor.</a:t>
+            </a:r>
+          </a:p>
+          <a:p>
+            <a:pPr>
+              <a:spcAft>
+                <a:spcPts val="600"/>
+              </a:spcAft>
+            </a:pPr>
+            <a:r>
+              <a:rPr sz="1500">
+                <a:solidFill>
+                  <a:srgbClr val="22282E"/>
+                </a:solidFill>
+              </a:rPr>
+              <a:t>•  Encuentra en el JS un endpoint que no aparece navegando por la UI.</a:t>
+            </a:r>
+          </a:p>
+          <a:p>
+            <a:pPr>
+              <a:spcAft>
+                <a:spcPts val="600"/>
+              </a:spcAft>
+            </a:pPr>
+            <a:r>
+              <a:rPr sz="1500">
+                <a:solidFill>
+                  <a:srgbClr val="22282E"/>
+                </a:solidFill>
+              </a:rPr>
+              <a:t>•  Marca en tu diagrama dónde entra un token de sesión y hasta dónde viaja.</a:t>
+            </a:r>
+          </a:p>
+          <a:p>
+            <a:pPr>
+              <a:spcAft>
+                <a:spcPts val="600"/>
+              </a:spcAft>
+            </a:pPr>
+            <a:r>
+              <a:rPr sz="1500">
+                <a:solidFill>
+                  <a:srgbClr val="22282E"/>
+                </a:solidFill>
+              </a:rPr>
+              <a:t>•  Investiga qué es el endpoint de metadata en AWS/GCP/Azure y por qué es sensible.</a:t>
+            </a:r>
+          </a:p>
+          <a:p>
+            <a:pPr>
+              <a:spcAft>
+                <a:spcPts val="600"/>
+              </a:spcAft>
+            </a:pPr>
+            <a:r>
+              <a:rPr sz="1500">
+                <a:solidFill>
+                  <a:srgbClr val="22282E"/>
+                </a:solidFill>
+              </a:rPr>
+              <a:t>•  Compara la superficie de ataque de una SPA vs. una app SSR clásica.</a:t>
             </a:r>
           </a:p>
         </p:txBody>
@@ -3347,7 +3365,7 @@
                   <a:srgbClr val="0B3D2E"/>
                 </a:solidFill>
               </a:rPr>
-              <a:t>❓ Preguntas frecuentes</a:t>
+              <a:t>📝 Reto verificable</a:t>
             </a:r>
           </a:p>
         </p:txBody>
@@ -3385,82 +3403,22 @@
                   <a:srgbClr val="22282E"/>
                 </a:solidFill>
               </a:rPr>
-              <a:t>•  ❓ ¿Por qué no basta con la validación del formulario?</a:t>
-            </a:r>
-          </a:p>
-          <a:p>
-            <a:pPr>
-              <a:spcAft>
-                <a:spcPts val="600"/>
-              </a:spcAft>
-            </a:pPr>
-            <a:r>
-              <a:rPr sz="1500">
-                <a:solidFill>
-                  <a:srgbClr val="22282E"/>
-                </a:solidFill>
-              </a:rPr>
-              <a:t>•  Porque corre en el cliente y se puede desactivar o saltar con un proxy. La seguridad se decide en el servidor.</a:t>
-            </a:r>
-          </a:p>
-          <a:p>
-            <a:pPr>
-              <a:spcAft>
-                <a:spcPts val="600"/>
-              </a:spcAft>
-            </a:pPr>
-            <a:r>
-              <a:rPr sz="1500">
-                <a:solidFill>
-                  <a:srgbClr val="22282E"/>
-                </a:solidFill>
-              </a:rPr>
-              <a:t>•  ❓ ¿La superficie de ataque de una API es distinta a la de la web?</a:t>
-            </a:r>
-          </a:p>
-          <a:p>
-            <a:pPr>
-              <a:spcAft>
-                <a:spcPts val="600"/>
-              </a:spcAft>
-            </a:pPr>
-            <a:r>
-              <a:rPr sz="1500">
-                <a:solidFill>
-                  <a:srgbClr val="22282E"/>
-                </a:solidFill>
-              </a:rPr>
-              <a:t>•  Es la misma lógica, pero la API suele exponer más operaciones y menos protecciones cosméticas, así que a menudo es más fértil.</a:t>
-            </a:r>
-          </a:p>
-          <a:p>
-            <a:pPr>
-              <a:spcAft>
-                <a:spcPts val="600"/>
-              </a:spcAft>
-            </a:pPr>
-            <a:r>
-              <a:rPr sz="1500">
-                <a:solidFill>
-                  <a:srgbClr val="22282E"/>
-                </a:solidFill>
-              </a:rPr>
-              <a:t>•  ❓ ¿Necesito Burp Professional?</a:t>
-            </a:r>
-          </a:p>
-          <a:p>
-            <a:pPr>
-              <a:spcAft>
-                <a:spcPts val="600"/>
-              </a:spcAft>
-            </a:pPr>
-            <a:r>
-              <a:rPr sz="1500">
-                <a:solidFill>
-                  <a:srgbClr val="22282E"/>
-                </a:solidFill>
-              </a:rPr>
-              <a:t>•  No para empezar. Community cubre esta parte; Pro añade el scanner automático y algunas utilidades de Intruder.</a:t>
+              <a:t>•  Entrega un diagrama de superficie de ataque de Juice Shop con al menos 12 puntos de entrada, fronteras de confianza señaladas y una tabla de endpoints priorizada.</a:t>
+            </a:r>
+          </a:p>
+          <a:p>
+            <a:pPr>
+              <a:spcAft>
+                <a:spcPts val="600"/>
+              </a:spcAft>
+            </a:pPr>
+            <a:r>
+              <a:rPr sz="1500">
+                <a:solidFill>
+                  <a:srgbClr val="22282E"/>
+                </a:solidFill>
+              </a:rPr>
+              <a:t>•  Criterio de aceptación: el diagrama incluye cliente, API, datos y servicios; cada endpoint tiene método, autenticación requerida (sí/no) y nivel de sensibilidad 1–3.</a:t>
             </a:r>
           </a:p>
         </p:txBody>
@@ -3511,7 +3469,7 @@
                   <a:srgbClr val="0B3D2E"/>
                 </a:solidFill>
               </a:rPr>
-              <a:t>🔗 Referencias</a:t>
+              <a:t>⚠️ Errores comunes</a:t>
             </a:r>
           </a:p>
         </p:txBody>
@@ -3549,6 +3507,319 @@
                   <a:srgbClr val="22282E"/>
                 </a:solidFill>
               </a:rPr>
+              <a:t>•  Burp no ve tráfico HTTPS — Falta instalar el CA de Burp en el navegador</a:t>
+            </a:r>
+          </a:p>
+          <a:p>
+            <a:pPr>
+              <a:spcAft>
+                <a:spcPts val="600"/>
+              </a:spcAft>
+            </a:pPr>
+            <a:r>
+              <a:rPr sz="1500">
+                <a:solidFill>
+                  <a:srgbClr val="22282E"/>
+                </a:solidFill>
+              </a:rPr>
+              <a:t>•  "Confiar solo en la UI" — Endpoints ocultos en el JS; revisa Sources y sitemap</a:t>
+            </a:r>
+          </a:p>
+          <a:p>
+            <a:pPr>
+              <a:spcAft>
+                <a:spcPts val="600"/>
+              </a:spcAft>
+            </a:pPr>
+            <a:r>
+              <a:rPr sz="1500">
+                <a:solidFill>
+                  <a:srgbClr val="22282E"/>
+                </a:solidFill>
+              </a:rPr>
+              <a:t>•  Se ignoran cabeceras y cookies — Son inputs válidos; inclúyelos en el mapa</a:t>
+            </a:r>
+          </a:p>
+          <a:p>
+            <a:pPr>
+              <a:spcAft>
+                <a:spcPts val="600"/>
+              </a:spcAft>
+            </a:pPr>
+            <a:r>
+              <a:rPr sz="1500">
+                <a:solidFill>
+                  <a:srgbClr val="22282E"/>
+                </a:solidFill>
+              </a:rPr>
+              <a:t>•  Escanear fuera del laboratorio — Ilegal sin permiso; limita el scope en Burp</a:t>
+            </a:r>
+          </a:p>
+          <a:p>
+            <a:pPr>
+              <a:spcAft>
+                <a:spcPts val="600"/>
+              </a:spcAft>
+            </a:pPr>
+            <a:r>
+              <a:rPr sz="1500">
+                <a:solidFill>
+                  <a:srgbClr val="22282E"/>
+                </a:solidFill>
+              </a:rPr>
+              <a:t>•  Confundir HTTP/2 con HTTP/1 — Afecta a ataques de smuggling; identifica el protocolo</a:t>
+            </a:r>
+          </a:p>
+        </p:txBody>
+      </p:sp>
+    </p:spTree>
+  </p:cSld>
+  <p:clrMapOvr>
+    <a:masterClrMapping/>
+  </p:clrMapOvr>
+</p:sld>
+</file>
+
+<file path=ppt/slides/slide13.xml><?xml version="1.0" encoding="utf-8"?>
+<p:sld xmlns:a="http://schemas.openxmlformats.org/drawingml/2006/main" xmlns:p="http://schemas.openxmlformats.org/presentationml/2006/main" xmlns:r="http://schemas.openxmlformats.org/officeDocument/2006/relationships">
+  <p:cSld>
+    <p:spTree>
+      <p:nvGrpSpPr>
+        <p:cNvPr id="1" name=""/>
+        <p:cNvGrpSpPr/>
+        <p:nvPr/>
+      </p:nvGrpSpPr>
+      <p:grpSpPr/>
+      <p:sp>
+        <p:nvSpPr>
+          <p:cNvPr id="2" name="TextBox 1"/>
+          <p:cNvSpPr txBox="1"/>
+          <p:nvPr/>
+        </p:nvSpPr>
+        <p:spPr>
+          <a:xfrm>
+            <a:off x="457200" y="320040"/>
+            <a:ext cx="8229600" cy="822960"/>
+          </a:xfrm>
+          <a:prstGeom prst="rect">
+            <a:avLst/>
+          </a:prstGeom>
+          <a:noFill/>
+        </p:spPr>
+        <p:txBody>
+          <a:bodyPr wrap="square">
+            <a:spAutoFit/>
+          </a:bodyPr>
+          <a:lstStyle/>
+          <a:p>
+            <a:r>
+              <a:rPr sz="2600" b="1">
+                <a:solidFill>
+                  <a:srgbClr val="0B3D2E"/>
+                </a:solidFill>
+              </a:rPr>
+              <a:t>❓ Preguntas frecuentes</a:t>
+            </a:r>
+          </a:p>
+        </p:txBody>
+      </p:sp>
+      <p:sp>
+        <p:nvSpPr>
+          <p:cNvPr id="3" name="TextBox 2"/>
+          <p:cNvSpPr txBox="1"/>
+          <p:nvPr/>
+        </p:nvSpPr>
+        <p:spPr>
+          <a:xfrm>
+            <a:off x="457200" y="1280160"/>
+            <a:ext cx="8229600" cy="4937760"/>
+          </a:xfrm>
+          <a:prstGeom prst="rect">
+            <a:avLst/>
+          </a:prstGeom>
+          <a:noFill/>
+        </p:spPr>
+        <p:txBody>
+          <a:bodyPr wrap="square">
+            <a:spAutoFit/>
+          </a:bodyPr>
+          <a:lstStyle/>
+          <a:p>
+            <a:pPr>
+              <a:spcAft>
+                <a:spcPts val="600"/>
+              </a:spcAft>
+            </a:pPr>
+            <a:r>
+              <a:rPr sz="1500">
+                <a:solidFill>
+                  <a:srgbClr val="22282E"/>
+                </a:solidFill>
+              </a:rPr>
+              <a:t>•  ❓ ¿Por qué no basta con la validación del formulario?</a:t>
+            </a:r>
+          </a:p>
+          <a:p>
+            <a:pPr>
+              <a:spcAft>
+                <a:spcPts val="600"/>
+              </a:spcAft>
+            </a:pPr>
+            <a:r>
+              <a:rPr sz="1500">
+                <a:solidFill>
+                  <a:srgbClr val="22282E"/>
+                </a:solidFill>
+              </a:rPr>
+              <a:t>•  Porque corre en el cliente y se puede desactivar o saltar con un proxy. La seguridad se decide en el servidor.</a:t>
+            </a:r>
+          </a:p>
+          <a:p>
+            <a:pPr>
+              <a:spcAft>
+                <a:spcPts val="600"/>
+              </a:spcAft>
+            </a:pPr>
+            <a:r>
+              <a:rPr sz="1500">
+                <a:solidFill>
+                  <a:srgbClr val="22282E"/>
+                </a:solidFill>
+              </a:rPr>
+              <a:t>•  ❓ ¿La superficie de ataque de una API es distinta a la de la web?</a:t>
+            </a:r>
+          </a:p>
+          <a:p>
+            <a:pPr>
+              <a:spcAft>
+                <a:spcPts val="600"/>
+              </a:spcAft>
+            </a:pPr>
+            <a:r>
+              <a:rPr sz="1500">
+                <a:solidFill>
+                  <a:srgbClr val="22282E"/>
+                </a:solidFill>
+              </a:rPr>
+              <a:t>•  Es la misma lógica, pero la API suele exponer más operaciones y menos protecciones cosméticas, así que a menudo es más fértil.</a:t>
+            </a:r>
+          </a:p>
+          <a:p>
+            <a:pPr>
+              <a:spcAft>
+                <a:spcPts val="600"/>
+              </a:spcAft>
+            </a:pPr>
+            <a:r>
+              <a:rPr sz="1500">
+                <a:solidFill>
+                  <a:srgbClr val="22282E"/>
+                </a:solidFill>
+              </a:rPr>
+              <a:t>•  ❓ ¿Necesito Burp Professional?</a:t>
+            </a:r>
+          </a:p>
+          <a:p>
+            <a:pPr>
+              <a:spcAft>
+                <a:spcPts val="600"/>
+              </a:spcAft>
+            </a:pPr>
+            <a:r>
+              <a:rPr sz="1500">
+                <a:solidFill>
+                  <a:srgbClr val="22282E"/>
+                </a:solidFill>
+              </a:rPr>
+              <a:t>•  No para empezar. Community cubre esta parte; Pro añade el scanner automático y algunas utilidades de Intruder.</a:t>
+            </a:r>
+          </a:p>
+        </p:txBody>
+      </p:sp>
+    </p:spTree>
+  </p:cSld>
+  <p:clrMapOvr>
+    <a:masterClrMapping/>
+  </p:clrMapOvr>
+</p:sld>
+</file>
+
+<file path=ppt/slides/slide14.xml><?xml version="1.0" encoding="utf-8"?>
+<p:sld xmlns:a="http://schemas.openxmlformats.org/drawingml/2006/main" xmlns:p="http://schemas.openxmlformats.org/presentationml/2006/main" xmlns:r="http://schemas.openxmlformats.org/officeDocument/2006/relationships">
+  <p:cSld>
+    <p:spTree>
+      <p:nvGrpSpPr>
+        <p:cNvPr id="1" name=""/>
+        <p:cNvGrpSpPr/>
+        <p:nvPr/>
+      </p:nvGrpSpPr>
+      <p:grpSpPr/>
+      <p:sp>
+        <p:nvSpPr>
+          <p:cNvPr id="2" name="TextBox 1"/>
+          <p:cNvSpPr txBox="1"/>
+          <p:nvPr/>
+        </p:nvSpPr>
+        <p:spPr>
+          <a:xfrm>
+            <a:off x="457200" y="320040"/>
+            <a:ext cx="8229600" cy="822960"/>
+          </a:xfrm>
+          <a:prstGeom prst="rect">
+            <a:avLst/>
+          </a:prstGeom>
+          <a:noFill/>
+        </p:spPr>
+        <p:txBody>
+          <a:bodyPr wrap="square">
+            <a:spAutoFit/>
+          </a:bodyPr>
+          <a:lstStyle/>
+          <a:p>
+            <a:r>
+              <a:rPr sz="2600" b="1">
+                <a:solidFill>
+                  <a:srgbClr val="0B3D2E"/>
+                </a:solidFill>
+              </a:rPr>
+              <a:t>🔗 Referencias</a:t>
+            </a:r>
+          </a:p>
+        </p:txBody>
+      </p:sp>
+      <p:sp>
+        <p:nvSpPr>
+          <p:cNvPr id="3" name="TextBox 2"/>
+          <p:cNvSpPr txBox="1"/>
+          <p:nvPr/>
+        </p:nvSpPr>
+        <p:spPr>
+          <a:xfrm>
+            <a:off x="457200" y="1280160"/>
+            <a:ext cx="8229600" cy="4937760"/>
+          </a:xfrm>
+          <a:prstGeom prst="rect">
+            <a:avLst/>
+          </a:prstGeom>
+          <a:noFill/>
+        </p:spPr>
+        <p:txBody>
+          <a:bodyPr wrap="square">
+            <a:spAutoFit/>
+          </a:bodyPr>
+          <a:lstStyle/>
+          <a:p>
+            <a:pPr>
+              <a:spcAft>
+                <a:spcPts val="600"/>
+              </a:spcAft>
+            </a:pPr>
+            <a:r>
+              <a:rPr sz="1500">
+                <a:solidFill>
+                  <a:srgbClr val="22282E"/>
+                </a:solidFill>
+              </a:rPr>
               <a:t>•  Stuttard &amp; Pinto, The Web Application Hacker's Handbook, cap. 1–4.</a:t>
             </a:r>
           </a:p>
@@ -3599,6 +3870,81 @@
           </a:p>
         </p:txBody>
       </p:sp>
+    </p:spTree>
+  </p:cSld>
+  <p:clrMapOvr>
+    <a:masterClrMapping/>
+  </p:clrMapOvr>
+</p:sld>
+</file>
+
+<file path=ppt/slides/slide15.xml><?xml version="1.0" encoding="utf-8"?>
+<p:sld xmlns:a="http://schemas.openxmlformats.org/drawingml/2006/main" xmlns:p="http://schemas.openxmlformats.org/presentationml/2006/main" xmlns:r="http://schemas.openxmlformats.org/officeDocument/2006/relationships">
+  <p:cSld>
+    <p:spTree>
+      <p:nvGrpSpPr>
+        <p:cNvPr id="1" name=""/>
+        <p:cNvGrpSpPr/>
+        <p:nvPr/>
+      </p:nvGrpSpPr>
+      <p:grpSpPr/>
+      <p:sp>
+        <p:nvSpPr>
+          <p:cNvPr id="2" name="TextBox 1"/>
+          <p:cNvSpPr txBox="1"/>
+          <p:nvPr/>
+        </p:nvSpPr>
+        <p:spPr>
+          <a:xfrm>
+            <a:off x="457200" y="274320"/>
+            <a:ext cx="8229600" cy="640080"/>
+          </a:xfrm>
+          <a:prstGeom prst="rect">
+            <a:avLst/>
+          </a:prstGeom>
+          <a:noFill/>
+        </p:spPr>
+        <p:txBody>
+          <a:bodyPr wrap="square">
+            <a:spAutoFit/>
+          </a:bodyPr>
+          <a:lstStyle/>
+          <a:p>
+            <a:r>
+              <a:rPr sz="2200" b="1">
+                <a:solidFill>
+                  <a:srgbClr val="0B3D2E"/>
+                </a:solidFill>
+              </a:rPr>
+              <a:t>Diagrama de la clase</a:t>
+            </a:r>
+          </a:p>
+        </p:txBody>
+      </p:sp>
+      <p:pic>
+        <p:nvPicPr>
+          <p:cNvPr id="3" name="Picture 2" descr="8a77b961834ca930.png"/>
+          <p:cNvPicPr>
+            <a:picLocks noChangeAspect="1"/>
+          </p:cNvPicPr>
+          <p:nvPr/>
+        </p:nvPicPr>
+        <p:blipFill>
+          <a:blip r:embed="rId2"/>
+          <a:stretch>
+            <a:fillRect/>
+          </a:stretch>
+        </p:blipFill>
+        <p:spPr>
+          <a:xfrm>
+            <a:off x="457200" y="3031236"/>
+            <a:ext cx="8229600" cy="1435608"/>
+          </a:xfrm>
+          <a:prstGeom prst="rect">
+            <a:avLst/>
+          </a:prstGeom>
+        </p:spPr>
+      </p:pic>
     </p:spTree>
   </p:cSld>
   <p:clrMapOvr>
@@ -3683,7 +4029,7 @@
                   <a:srgbClr val="22282E"/>
                 </a:solidFill>
               </a:rPr>
-              <a:t>•  Entender cómo está construida una aplicación web moderna —navegador, SPA, API, backend, base de datos, servicios cloud— y aprender a dibujar su superficie de ataque completa. Sin este mapa mental, el resto de la parte se convierte en probar payloads a ciegas; con él, cada prueba tiene un porqué.</a:t>
+              <a:t>•  Entender cómo está construida una aplicación web moderna —navegador, SPA, API, backend, base de datos, servicios cloud— y aprender a dibujar su superficie de ataque completa. Sin este mapa mental, el…</a:t>
             </a:r>
           </a:p>
         </p:txBody>
@@ -4077,7 +4423,7 @@
                   <a:srgbClr val="0B3D2E"/>
                 </a:solidFill>
               </a:rPr>
-              <a:t>📖 Definiciones y características</a:t>
+              <a:t>🧠 Explicación en profundidad</a:t>
             </a:r>
           </a:p>
         </p:txBody>
@@ -4115,82 +4461,97 @@
                   <a:srgbClr val="22282E"/>
                 </a:solidFill>
               </a:rPr>
-              <a:t>•  Superficie de ataque: conjunto de todos los puntos donde un atacante puede introducir o extraer datos. Característica clave: crece con cada parámetro, endpoint y cabecera nuevos.</a:t>
-            </a:r>
-          </a:p>
-          <a:p>
-            <a:pPr>
-              <a:spcAft>
-                <a:spcPts val="600"/>
-              </a:spcAft>
-            </a:pPr>
-            <a:r>
-              <a:rPr sz="1500">
-                <a:solidFill>
-                  <a:srgbClr val="22282E"/>
-                </a:solidFill>
-              </a:rPr>
-              <a:t>•  Punto de entrada (input): cualquier valor controlable por el cliente (query string, body, header, cookie, path). Característica: todo input no confiable debe validarse en el servidor.</a:t>
-            </a:r>
-          </a:p>
-          <a:p>
-            <a:pPr>
-              <a:spcAft>
-                <a:spcPts val="600"/>
-              </a:spcAft>
-            </a:pPr>
-            <a:r>
-              <a:rPr sz="1500">
-                <a:solidFill>
-                  <a:srgbClr val="22282E"/>
-                </a:solidFill>
-              </a:rPr>
-              <a:t>•  Frontera de confianza: línea que separa lo que controla el cliente de lo que controla el servidor. Característica: los controles del cliente son cosméticos, no de seguridad.</a:t>
-            </a:r>
-          </a:p>
-          <a:p>
-            <a:pPr>
-              <a:spcAft>
-                <a:spcPts val="600"/>
-              </a:spcAft>
-            </a:pPr>
-            <a:r>
-              <a:rPr sz="1500">
-                <a:solidFill>
-                  <a:srgbClr val="22282E"/>
-                </a:solidFill>
-              </a:rPr>
-              <a:t>•  SPA (Single Page Application): app que renderiza en el navegador y habla con una API. Característica: el código fuente JS es visible y revela endpoints.</a:t>
-            </a:r>
-          </a:p>
-          <a:p>
-            <a:pPr>
-              <a:spcAft>
-                <a:spcPts val="600"/>
-              </a:spcAft>
-            </a:pPr>
-            <a:r>
-              <a:rPr sz="1500">
-                <a:solidFill>
-                  <a:srgbClr val="22282E"/>
-                </a:solidFill>
-              </a:rPr>
-              <a:t>•  Endpoint de API: URL que expone una operación del backend. Característica: suele tener menos protección visual pero igual necesidad de autorización.</a:t>
-            </a:r>
-          </a:p>
-          <a:p>
-            <a:pPr>
-              <a:spcAft>
-                <a:spcPts val="600"/>
-              </a:spcAft>
-            </a:pPr>
-            <a:r>
-              <a:rPr sz="1500">
-                <a:solidFill>
-                  <a:srgbClr val="22282E"/>
-                </a:solidFill>
-              </a:rPr>
-              <a:t>•  Metadata endpoint (cloud): servicio interno (169.254.169.254) que entrega credenciales temporales. Característica: alcanzable vía SSRF si no se protege.</a:t>
+              <a:t>•  Una aplicación web moderna ya no es un servidor sirviendo páginas. Es una cadena de piezas</a:t>
+            </a:r>
+          </a:p>
+          <a:p>
+            <a:pPr>
+              <a:spcAft>
+                <a:spcPts val="600"/>
+              </a:spcAft>
+            </a:pPr>
+            <a:r>
+              <a:rPr sz="1500">
+                <a:solidFill>
+                  <a:srgbClr val="22282E"/>
+                </a:solidFill>
+              </a:rPr>
+              <a:t>•  —navegador, CDN, WAF, balanceador, servidor de aplicación, API, base de datos, servicios</a:t>
+            </a:r>
+          </a:p>
+          <a:p>
+            <a:pPr>
+              <a:spcAft>
+                <a:spcPts val="600"/>
+              </a:spcAft>
+            </a:pPr>
+            <a:r>
+              <a:rPr sz="1500">
+                <a:solidFill>
+                  <a:srgbClr val="22282E"/>
+                </a:solidFill>
+              </a:rPr>
+              <a:t>•  cloud— y cada una procesa la entrada del usuario de una forma distinta, lo que la</a:t>
+            </a:r>
+          </a:p>
+          <a:p>
+            <a:pPr>
+              <a:spcAft>
+                <a:spcPts val="600"/>
+              </a:spcAft>
+            </a:pPr>
+            <a:r>
+              <a:rPr sz="1500">
+                <a:solidFill>
+                  <a:srgbClr val="22282E"/>
+                </a:solidFill>
+              </a:rPr>
+              <a:t>•  convierte en un punto de ataque potencial. Entender esa arquitectura no es un preámbulo</a:t>
+            </a:r>
+          </a:p>
+          <a:p>
+            <a:pPr>
+              <a:spcAft>
+                <a:spcPts val="600"/>
+              </a:spcAft>
+            </a:pPr>
+            <a:r>
+              <a:rPr sz="1500">
+                <a:solidFill>
+                  <a:srgbClr val="22282E"/>
+                </a:solidFill>
+              </a:rPr>
+              <a:t>•  teórico: es lo que permite razonar dónde puede fallar algo. Una inyección SQL vive en el</a:t>
+            </a:r>
+          </a:p>
+          <a:p>
+            <a:pPr>
+              <a:spcAft>
+                <a:spcPts val="600"/>
+              </a:spcAft>
+            </a:pPr>
+            <a:r>
+              <a:rPr sz="1500">
+                <a:solidFill>
+                  <a:srgbClr val="22282E"/>
+                </a:solidFill>
+              </a:rPr>
+              <a:t>•  servidor de aplicación; un XSS, en el navegador; un SSRF, en la capacidad del backend de</a:t>
+            </a:r>
+          </a:p>
+          <a:p>
+            <a:pPr>
+              <a:spcAft>
+                <a:spcPts val="600"/>
+              </a:spcAft>
+            </a:pPr>
+            <a:r>
+              <a:rPr sz="1500">
+                <a:solidFill>
+                  <a:srgbClr val="22282E"/>
+                </a:solidFill>
+              </a:rPr>
+              <a:t>•  hacer peticiones; un cache poisoning, en la CDN. Sin el mapa, cada vulnerabilidad de las 29</a:t>
             </a:r>
           </a:p>
         </p:txBody>
@@ -4241,7 +4602,7 @@
                   <a:srgbClr val="0B3D2E"/>
                 </a:solidFill>
               </a:rPr>
-              <a:t>🧰 Herramientas y preparación</a:t>
+              <a:t>📖 Definiciones y características</a:t>
             </a:r>
           </a:p>
         </p:txBody>
@@ -4279,67 +4640,82 @@
                   <a:srgbClr val="22282E"/>
                 </a:solidFill>
               </a:rPr>
-              <a:t>•  Trabajaremos en un laboratorio aislado y autorizado. Nunca escanees aplicaciones de terceros sin permiso explícito.</a:t>
-            </a:r>
-          </a:p>
-          <a:p>
-            <a:pPr>
-              <a:spcAft>
-                <a:spcPts val="600"/>
-              </a:spcAft>
-            </a:pPr>
-            <a:r>
-              <a:rPr sz="1500">
-                <a:solidFill>
-                  <a:srgbClr val="22282E"/>
-                </a:solidFill>
-              </a:rPr>
-              <a:t>•  Navegador con DevTools (Firefox o Chromium).</a:t>
-            </a:r>
-          </a:p>
-          <a:p>
-            <a:pPr>
-              <a:spcAft>
-                <a:spcPts val="600"/>
-              </a:spcAft>
-            </a:pPr>
-            <a:r>
-              <a:rPr sz="1500">
-                <a:solidFill>
-                  <a:srgbClr val="22282E"/>
-                </a:solidFill>
-              </a:rPr>
-              <a:t>•  Burp Suite Community o OWASP ZAP como proxy.</a:t>
-            </a:r>
-          </a:p>
-          <a:p>
-            <a:pPr>
-              <a:spcAft>
-                <a:spcPts val="600"/>
-              </a:spcAft>
-            </a:pPr>
-            <a:r>
-              <a:rPr sz="1500">
-                <a:solidFill>
-                  <a:srgbClr val="22282E"/>
-                </a:solidFill>
-              </a:rPr>
-              <a:t>•  OWASP Juice Shop en local vía Docker:</a:t>
-            </a:r>
-          </a:p>
-          <a:p>
-            <a:pPr>
-              <a:spcAft>
-                <a:spcPts val="600"/>
-              </a:spcAft>
-            </a:pPr>
-            <a:r>
-              <a:rPr sz="1500">
-                <a:solidFill>
-                  <a:srgbClr val="22282E"/>
-                </a:solidFill>
-              </a:rPr>
-              <a:t>•  docker run --rm -d -p 3000:3000 bkimminich/juice-shop</a:t>
+              <a:t>•  Superficie de ataque: conjunto de todos los puntos donde un atacante puede introducir o extraer datos. Característica clave: crece con cada parámetro, endpoint y cabecera nuevos.</a:t>
+            </a:r>
+          </a:p>
+          <a:p>
+            <a:pPr>
+              <a:spcAft>
+                <a:spcPts val="600"/>
+              </a:spcAft>
+            </a:pPr>
+            <a:r>
+              <a:rPr sz="1500">
+                <a:solidFill>
+                  <a:srgbClr val="22282E"/>
+                </a:solidFill>
+              </a:rPr>
+              <a:t>•  Punto de entrada (input): cualquier valor controlable por el cliente (query string, body, header, cookie, path). Característica: todo input no confiable debe validarse en el servidor.</a:t>
+            </a:r>
+          </a:p>
+          <a:p>
+            <a:pPr>
+              <a:spcAft>
+                <a:spcPts val="600"/>
+              </a:spcAft>
+            </a:pPr>
+            <a:r>
+              <a:rPr sz="1500">
+                <a:solidFill>
+                  <a:srgbClr val="22282E"/>
+                </a:solidFill>
+              </a:rPr>
+              <a:t>•  Frontera de confianza: línea que separa lo que controla el cliente de lo que controla el servidor. Característica: los controles del cliente son cosméticos, no de seguridad.</a:t>
+            </a:r>
+          </a:p>
+          <a:p>
+            <a:pPr>
+              <a:spcAft>
+                <a:spcPts val="600"/>
+              </a:spcAft>
+            </a:pPr>
+            <a:r>
+              <a:rPr sz="1500">
+                <a:solidFill>
+                  <a:srgbClr val="22282E"/>
+                </a:solidFill>
+              </a:rPr>
+              <a:t>•  SPA (Single Page Application): app que renderiza en el navegador y habla con una API. Característica: el código fuente JS es visible y revela endpoints.</a:t>
+            </a:r>
+          </a:p>
+          <a:p>
+            <a:pPr>
+              <a:spcAft>
+                <a:spcPts val="600"/>
+              </a:spcAft>
+            </a:pPr>
+            <a:r>
+              <a:rPr sz="1500">
+                <a:solidFill>
+                  <a:srgbClr val="22282E"/>
+                </a:solidFill>
+              </a:rPr>
+              <a:t>•  Endpoint de API: URL que expone una operación del backend. Característica: suele tener menos protección visual pero igual necesidad de autorización.</a:t>
+            </a:r>
+          </a:p>
+          <a:p>
+            <a:pPr>
+              <a:spcAft>
+                <a:spcPts val="600"/>
+              </a:spcAft>
+            </a:pPr>
+            <a:r>
+              <a:rPr sz="1500">
+                <a:solidFill>
+                  <a:srgbClr val="22282E"/>
+                </a:solidFill>
+              </a:rPr>
+              <a:t>•  Metadata endpoint (cloud): servicio interno (169.254.169.254) que entrega credenciales temporales. Característica: alcanzable vía SSRF si no se protege.</a:t>
             </a:r>
           </a:p>
         </p:txBody>
@@ -4390,7 +4766,7 @@
                   <a:srgbClr val="0B3D2E"/>
                 </a:solidFill>
               </a:rPr>
-              <a:t>🧪 Laboratorio guiado</a:t>
+              <a:t>📔 Glosario</a:t>
             </a:r>
           </a:p>
         </p:txBody>
@@ -4428,97 +4804,97 @@
                   <a:srgbClr val="22282E"/>
                 </a:solidFill>
               </a:rPr>
-              <a:t>•  Levanta Juice Shop y abre http://localhost:3000.</a:t>
-            </a:r>
-          </a:p>
-          <a:p>
-            <a:pPr>
-              <a:spcAft>
-                <a:spcPts val="600"/>
-              </a:spcAft>
-            </a:pPr>
-            <a:r>
-              <a:rPr sz="1500">
-                <a:solidFill>
-                  <a:srgbClr val="22282E"/>
-                </a:solidFill>
-              </a:rPr>
-              <a:t>•  Abre DevTools → pestaña Network. Recarga y observa las llamadas a /rest/ y /api/.</a:t>
-            </a:r>
-          </a:p>
-          <a:p>
-            <a:pPr>
-              <a:spcAft>
-                <a:spcPts val="600"/>
-              </a:spcAft>
-            </a:pPr>
-            <a:r>
-              <a:rPr sz="1500">
-                <a:solidFill>
-                  <a:srgbClr val="22282E"/>
-                </a:solidFill>
-              </a:rPr>
-              <a:t>•  Anota cada endpoint distinto en una tabla: método, ruta, parámetros, si requiere token.</a:t>
-            </a:r>
-          </a:p>
-          <a:p>
-            <a:pPr>
-              <a:spcAft>
-                <a:spcPts val="600"/>
-              </a:spcAft>
-            </a:pPr>
-            <a:r>
-              <a:rPr sz="1500">
-                <a:solidFill>
-                  <a:srgbClr val="22282E"/>
-                </a:solidFill>
-              </a:rPr>
-              <a:t>•  Inspecciona el JavaScript cargado (Sources): busca rutas de API embebidas y roles (admin, accounting).</a:t>
-            </a:r>
-          </a:p>
-          <a:p>
-            <a:pPr>
-              <a:spcAft>
-                <a:spcPts val="600"/>
-              </a:spcAft>
-            </a:pPr>
-            <a:r>
-              <a:rPr sz="1500">
-                <a:solidFill>
-                  <a:srgbClr val="22282E"/>
-                </a:solidFill>
-              </a:rPr>
-              <a:t>•  Configura el navegador para pasar por Burp (proxy 127.0.0.1:8080). Instala el certificado CA de Burp.</a:t>
-            </a:r>
-          </a:p>
-          <a:p>
-            <a:pPr>
-              <a:spcAft>
-                <a:spcPts val="600"/>
-              </a:spcAft>
-            </a:pPr>
-            <a:r>
-              <a:rPr sz="1500">
-                <a:solidFill>
-                  <a:srgbClr val="22282E"/>
-                </a:solidFill>
-              </a:rPr>
-              <a:t>•  Repite la navegación con Burp interceptando: revisa HTTP history y filtra por In-scope.</a:t>
-            </a:r>
-          </a:p>
-          <a:p>
-            <a:pPr>
-              <a:spcAft>
-                <a:spcPts val="600"/>
-              </a:spcAft>
-            </a:pPr>
-            <a:r>
-              <a:rPr sz="1500">
-                <a:solidFill>
-                  <a:srgbClr val="22282E"/>
-                </a:solidFill>
-              </a:rPr>
-              <a:t>•  Dibuja el diagrama: cliente → API (/rest, /api) → base de datos → servicios (mail, upload). Marca fronteras de confianza.</a:t>
+              <a:t>•  Término — Definición concisa</a:t>
+            </a:r>
+          </a:p>
+          <a:p>
+            <a:pPr>
+              <a:spcAft>
+                <a:spcPts val="600"/>
+              </a:spcAft>
+            </a:pPr>
+            <a:r>
+              <a:rPr sz="1500">
+                <a:solidFill>
+                  <a:srgbClr val="22282E"/>
+                </a:solidFill>
+              </a:rPr>
+              <a:t>•  Cliente-servidor — El navegador pide, el servidor responde sobre HTTP/HTTPS</a:t>
+            </a:r>
+          </a:p>
+          <a:p>
+            <a:pPr>
+              <a:spcAft>
+                <a:spcPts val="600"/>
+              </a:spcAft>
+            </a:pPr>
+            <a:r>
+              <a:rPr sz="1500">
+                <a:solidFill>
+                  <a:srgbClr val="22282E"/>
+                </a:solidFill>
+              </a:rPr>
+              <a:t>•  SSR — Renderizado en servidor; cada acción pide una página nueva</a:t>
+            </a:r>
+          </a:p>
+          <a:p>
+            <a:pPr>
+              <a:spcAft>
+                <a:spcPts val="600"/>
+              </a:spcAft>
+            </a:pPr>
+            <a:r>
+              <a:rPr sz="1500">
+                <a:solidFill>
+                  <a:srgbClr val="22282E"/>
+                </a:solidFill>
+              </a:rPr>
+              <a:t>•  SPA — Aplicación de una página; JS en el cliente habla con una API</a:t>
+            </a:r>
+          </a:p>
+          <a:p>
+            <a:pPr>
+              <a:spcAft>
+                <a:spcPts val="600"/>
+              </a:spcAft>
+            </a:pPr>
+            <a:r>
+              <a:rPr sz="1500">
+                <a:solidFill>
+                  <a:srgbClr val="22282E"/>
+                </a:solidFill>
+              </a:rPr>
+              <a:t>•  API REST / GraphQL — Backend que devuelve datos estructurados, no HTML</a:t>
+            </a:r>
+          </a:p>
+          <a:p>
+            <a:pPr>
+              <a:spcAft>
+                <a:spcPts val="600"/>
+              </a:spcAft>
+            </a:pPr>
+            <a:r>
+              <a:rPr sz="1500">
+                <a:solidFill>
+                  <a:srgbClr val="22282E"/>
+                </a:solidFill>
+              </a:rPr>
+              <a:t>•  Nunca confíes en el cliente — La validación real ocurre en el servidor</a:t>
+            </a:r>
+          </a:p>
+          <a:p>
+            <a:pPr>
+              <a:spcAft>
+                <a:spcPts val="600"/>
+              </a:spcAft>
+            </a:pPr>
+            <a:r>
+              <a:rPr sz="1500">
+                <a:solidFill>
+                  <a:srgbClr val="22282E"/>
+                </a:solidFill>
+              </a:rPr>
+              <a:t>•  CDN — Red de distribución que cachea contenido cerca del usuario</a:t>
             </a:r>
           </a:p>
         </p:txBody>
@@ -4569,7 +4945,7 @@
                   <a:srgbClr val="0B3D2E"/>
                 </a:solidFill>
               </a:rPr>
-              <a:t>✍️ Ejercicios</a:t>
+              <a:t>🧰 Herramientas y preparación</a:t>
             </a:r>
           </a:p>
         </p:txBody>
@@ -4607,82 +4983,52 @@
                   <a:srgbClr val="22282E"/>
                 </a:solidFill>
               </a:rPr>
-              <a:t>•  Lista 10 puntos de entrada distintos en Juice Shop (incluye cabeceras y cookies).</a:t>
-            </a:r>
-          </a:p>
-          <a:p>
-            <a:pPr>
-              <a:spcAft>
-                <a:spcPts val="600"/>
-              </a:spcAft>
-            </a:pPr>
-            <a:r>
-              <a:rPr sz="1500">
-                <a:solidFill>
-                  <a:srgbClr val="22282E"/>
-                </a:solidFill>
-              </a:rPr>
-              <a:t>•  Identifica qué controles de seguridad son de cliente (validación JS) y cuáles de servidor.</a:t>
-            </a:r>
-          </a:p>
-          <a:p>
-            <a:pPr>
-              <a:spcAft>
-                <a:spcPts val="600"/>
-              </a:spcAft>
-            </a:pPr>
-            <a:r>
-              <a:rPr sz="1500">
-                <a:solidFill>
-                  <a:srgbClr val="22282E"/>
-                </a:solidFill>
-              </a:rPr>
-              <a:t>•  Encuentra en el JS un endpoint que no aparece navegando por la UI.</a:t>
-            </a:r>
-          </a:p>
-          <a:p>
-            <a:pPr>
-              <a:spcAft>
-                <a:spcPts val="600"/>
-              </a:spcAft>
-            </a:pPr>
-            <a:r>
-              <a:rPr sz="1500">
-                <a:solidFill>
-                  <a:srgbClr val="22282E"/>
-                </a:solidFill>
-              </a:rPr>
-              <a:t>•  Marca en tu diagrama dónde entra un token de sesión y hasta dónde viaja.</a:t>
-            </a:r>
-          </a:p>
-          <a:p>
-            <a:pPr>
-              <a:spcAft>
-                <a:spcPts val="600"/>
-              </a:spcAft>
-            </a:pPr>
-            <a:r>
-              <a:rPr sz="1500">
-                <a:solidFill>
-                  <a:srgbClr val="22282E"/>
-                </a:solidFill>
-              </a:rPr>
-              <a:t>•  Investiga qué es el endpoint de metadata en AWS/GCP/Azure y por qué es sensible.</a:t>
-            </a:r>
-          </a:p>
-          <a:p>
-            <a:pPr>
-              <a:spcAft>
-                <a:spcPts val="600"/>
-              </a:spcAft>
-            </a:pPr>
-            <a:r>
-              <a:rPr sz="1500">
-                <a:solidFill>
-                  <a:srgbClr val="22282E"/>
-                </a:solidFill>
-              </a:rPr>
-              <a:t>•  Compara la superficie de ataque de una SPA vs. una app SSR clásica.</a:t>
+              <a:t>•  Trabajaremos en un laboratorio aislado y autorizado. Nunca escanees aplicaciones de terceros sin permiso explícito.</a:t>
+            </a:r>
+          </a:p>
+          <a:p>
+            <a:pPr>
+              <a:spcAft>
+                <a:spcPts val="600"/>
+              </a:spcAft>
+            </a:pPr>
+            <a:r>
+              <a:rPr sz="1500">
+                <a:solidFill>
+                  <a:srgbClr val="22282E"/>
+                </a:solidFill>
+              </a:rPr>
+              <a:t>•  Navegador con DevTools (Firefox o Chromium).</a:t>
+            </a:r>
+          </a:p>
+          <a:p>
+            <a:pPr>
+              <a:spcAft>
+                <a:spcPts val="600"/>
+              </a:spcAft>
+            </a:pPr>
+            <a:r>
+              <a:rPr sz="1500">
+                <a:solidFill>
+                  <a:srgbClr val="22282E"/>
+                </a:solidFill>
+              </a:rPr>
+              <a:t>•  Burp Suite Community o OWASP ZAP como proxy.</a:t>
+            </a:r>
+          </a:p>
+          <a:p>
+            <a:pPr>
+              <a:spcAft>
+                <a:spcPts val="600"/>
+              </a:spcAft>
+            </a:pPr>
+            <a:r>
+              <a:rPr sz="1500">
+                <a:solidFill>
+                  <a:srgbClr val="22282E"/>
+                </a:solidFill>
+              </a:rPr>
+              <a:t>•  OWASP Juice Shop en local vía Docker:</a:t>
             </a:r>
           </a:p>
         </p:txBody>
@@ -4733,7 +5079,7 @@
                   <a:srgbClr val="0B3D2E"/>
                 </a:solidFill>
               </a:rPr>
-              <a:t>📝 Reto verificable</a:t>
+              <a:t>🧪 Laboratorio guiado</a:t>
             </a:r>
           </a:p>
         </p:txBody>
@@ -4771,22 +5117,97 @@
                   <a:srgbClr val="22282E"/>
                 </a:solidFill>
               </a:rPr>
-              <a:t>•  Entrega un diagrama de superficie de ataque de Juice Shop con al menos 12 puntos de entrada, fronteras de confianza señaladas y una tabla de endpoints priorizada.</a:t>
-            </a:r>
-          </a:p>
-          <a:p>
-            <a:pPr>
-              <a:spcAft>
-                <a:spcPts val="600"/>
-              </a:spcAft>
-            </a:pPr>
-            <a:r>
-              <a:rPr sz="1500">
-                <a:solidFill>
-                  <a:srgbClr val="22282E"/>
-                </a:solidFill>
-              </a:rPr>
-              <a:t>•  Criterio de aceptación: el diagrama incluye cliente, API, datos y servicios; cada endpoint tiene método, autenticación requerida (sí/no) y nivel de sensibilidad 1–3.</a:t>
+              <a:t>•  Levanta Juice Shop y abre http://localhost:3000.</a:t>
+            </a:r>
+          </a:p>
+          <a:p>
+            <a:pPr>
+              <a:spcAft>
+                <a:spcPts val="600"/>
+              </a:spcAft>
+            </a:pPr>
+            <a:r>
+              <a:rPr sz="1500">
+                <a:solidFill>
+                  <a:srgbClr val="22282E"/>
+                </a:solidFill>
+              </a:rPr>
+              <a:t>•  Abre DevTools → pestaña Network. Recarga y observa las llamadas a /rest/ y /api/.</a:t>
+            </a:r>
+          </a:p>
+          <a:p>
+            <a:pPr>
+              <a:spcAft>
+                <a:spcPts val="600"/>
+              </a:spcAft>
+            </a:pPr>
+            <a:r>
+              <a:rPr sz="1500">
+                <a:solidFill>
+                  <a:srgbClr val="22282E"/>
+                </a:solidFill>
+              </a:rPr>
+              <a:t>•  Anota cada endpoint distinto en una tabla: método, ruta, parámetros, si requiere token.</a:t>
+            </a:r>
+          </a:p>
+          <a:p>
+            <a:pPr>
+              <a:spcAft>
+                <a:spcPts val="600"/>
+              </a:spcAft>
+            </a:pPr>
+            <a:r>
+              <a:rPr sz="1500">
+                <a:solidFill>
+                  <a:srgbClr val="22282E"/>
+                </a:solidFill>
+              </a:rPr>
+              <a:t>•  Inspecciona el JavaScript cargado (Sources): busca rutas de API embebidas y roles (admin, accounting).</a:t>
+            </a:r>
+          </a:p>
+          <a:p>
+            <a:pPr>
+              <a:spcAft>
+                <a:spcPts val="600"/>
+              </a:spcAft>
+            </a:pPr>
+            <a:r>
+              <a:rPr sz="1500">
+                <a:solidFill>
+                  <a:srgbClr val="22282E"/>
+                </a:solidFill>
+              </a:rPr>
+              <a:t>•  Configura el navegador para pasar por Burp (proxy 127.0.0.1:8080). Instala el certificado CA de Burp.</a:t>
+            </a:r>
+          </a:p>
+          <a:p>
+            <a:pPr>
+              <a:spcAft>
+                <a:spcPts val="600"/>
+              </a:spcAft>
+            </a:pPr>
+            <a:r>
+              <a:rPr sz="1500">
+                <a:solidFill>
+                  <a:srgbClr val="22282E"/>
+                </a:solidFill>
+              </a:rPr>
+              <a:t>•  Repite la navegación con Burp interceptando: revisa HTTP history y filtra por In-scope.</a:t>
+            </a:r>
+          </a:p>
+          <a:p>
+            <a:pPr>
+              <a:spcAft>
+                <a:spcPts val="600"/>
+              </a:spcAft>
+            </a:pPr>
+            <a:r>
+              <a:rPr sz="1500">
+                <a:solidFill>
+                  <a:srgbClr val="22282E"/>
+                </a:solidFill>
+              </a:rPr>
+              <a:t>•  Dibuja el diagrama: cliente → API (/rest, /api) → base de datos → servicios (mail, upload). Marca fronteras de confianza.</a:t>
             </a:r>
           </a:p>
         </p:txBody>
